--- a/presentations/start-04-making-the-case/Start_04_Making_the_Case_Narrated.pptx
+++ b/presentations/start-04-making-the-case/Start_04_Making_the_Case_Narrated.pptx
@@ -116,7 +116,7 @@
   <p:extLst>
     <p:ext uri="{521415D9-36F7-43E2-AB2F-B90AF26B5E84}">
       <p14:sectionLst xmlns:p14="http://schemas.microsoft.com/office/powerpoint/2010/main">
-        <p14:section name="Episode 4" id="{142029D9-3865-34B8-65C1-4EDDFA65E91C}">
+        <p14:section name="Episode 4" id="{31399AC6-C0B1-839A-2449-DF11CD3643E1}">
           <p14:sldIdLst>
             <p14:sldId id="256"/>
             <p14:sldId id="257"/>
@@ -130,7 +130,7 @@
             <p14:sldId id="265"/>
           </p14:sldIdLst>
         </p14:section>
-        <p14:section name="Backup" id="{4350038A-46FF-9939-0B13-77A442906F4D}">
+        <p14:section name="Backup" id="{57424166-0361-C302-B174-D0FE7FD50A01}">
           <p14:sldIdLst/>
         </p14:section>
       </p14:sectionLst>
@@ -167,7 +167,7 @@
     </p:spTree>
     <p:extLst>
       <p:ext uri="{BB962C8B-B14F-4D97-AF65-F5344CB8AC3E}">
-        <p14:creationId xmlns:p14="http://schemas.microsoft.com/office/powerpoint/2010/main" val="3607552526"/>
+        <p14:creationId xmlns:p14="http://schemas.microsoft.com/office/powerpoint/2010/main" val="1923115967"/>
       </p:ext>
     </p:extLst>
   </p:cSld>
@@ -2099,7 +2099,7 @@
             <a:hlinkClick r:id="" action="ppaction://media"/>
             <a:extLst>
               <a:ext uri="{FF2B5EF4-FFF2-40B4-BE49-F238E27FC236}">
-                <a16:creationId xmlns:a16="http://schemas.microsoft.com/office/drawing/2014/main" id="{F3C26538-2CA2-E1DD-BE27-AD9091D8CDD9}"/>
+                <a16:creationId xmlns:a16="http://schemas.microsoft.com/office/drawing/2014/main" id="{255EEC5C-2B6B-BB84-F753-79611AA011CE}"/>
               </a:ext>
             </a:extLst>
           </p:cNvPr>
@@ -2115,7 +2115,7 @@
                     <p:ext uri="{3AFAAA56-56D3-431D-BCD4-E75A35582382}">
                       <p173:tracksInfo xmlns:p173="http://schemas.microsoft.com/office/powerpoint/2017/3/main" displayLoc="slide">
                         <p173:trackLst>
-                          <p173:track id="{C8FC4023-3472-435F-82B2-E942446D26BE}" label="English (captions)" lang="en-US" r:embed="rId6"/>
+                          <p173:track id="{831CC697-057B-4E74-9614-48C2952A5882}" label="English (captions)" lang="en-US" r:embed="rId6"/>
                         </p173:trackLst>
                       </p173:tracksInfo>
                     </p:ext>
@@ -3548,7 +3548,7 @@
             <a:hlinkClick r:id="" action="ppaction://media"/>
             <a:extLst>
               <a:ext uri="{FF2B5EF4-FFF2-40B4-BE49-F238E27FC236}">
-                <a16:creationId xmlns:a16="http://schemas.microsoft.com/office/drawing/2014/main" id="{91326B70-E247-FA66-7FF6-3F4D851BE77C}"/>
+                <a16:creationId xmlns:a16="http://schemas.microsoft.com/office/drawing/2014/main" id="{66153FE0-C614-F6BF-EC2A-B9E5BB1296C1}"/>
               </a:ext>
             </a:extLst>
           </p:cNvPr>
@@ -3564,7 +3564,7 @@
                     <p:ext uri="{3AFAAA56-56D3-431D-BCD4-E75A35582382}">
                       <p173:tracksInfo xmlns:p173="http://schemas.microsoft.com/office/powerpoint/2017/3/main" displayLoc="slide">
                         <p173:trackLst>
-                          <p173:track id="{4DDB828D-1CD7-4DEC-B9DF-B67E936B4E05}" label="English (captions)" lang="en-US" r:embed="rId7"/>
+                          <p173:track id="{F262DCDB-770F-4434-B260-A95A560A2BFF}" label="English (captions)" lang="en-US" r:embed="rId7"/>
                         </p173:trackLst>
                       </p173:tracksInfo>
                     </p:ext>
@@ -4539,7 +4539,7 @@
             <a:hlinkClick r:id="" action="ppaction://media"/>
             <a:extLst>
               <a:ext uri="{FF2B5EF4-FFF2-40B4-BE49-F238E27FC236}">
-                <a16:creationId xmlns:a16="http://schemas.microsoft.com/office/drawing/2014/main" id="{30CF5ABB-8156-393E-D3E1-1EF8572ED4E0}"/>
+                <a16:creationId xmlns:a16="http://schemas.microsoft.com/office/drawing/2014/main" id="{AE3BD132-86AB-C7C2-09CD-89A4138348DD}"/>
               </a:ext>
             </a:extLst>
           </p:cNvPr>
@@ -4555,7 +4555,7 @@
                     <p:ext uri="{3AFAAA56-56D3-431D-BCD4-E75A35582382}">
                       <p173:tracksInfo xmlns:p173="http://schemas.microsoft.com/office/powerpoint/2017/3/main" displayLoc="slide">
                         <p173:trackLst>
-                          <p173:track id="{C242D85E-F756-4D53-9DFC-7BAF30151E3A}" label="English (captions)" lang="en-US" r:embed="rId8"/>
+                          <p173:track id="{4A24E7BF-BC99-43DB-BC3E-A0ACF2C9A525}" label="English (captions)" lang="en-US" r:embed="rId8"/>
                         </p173:trackLst>
                       </p173:tracksInfo>
                     </p:ext>
@@ -6130,7 +6130,7 @@
             <a:hlinkClick r:id="" action="ppaction://media"/>
             <a:extLst>
               <a:ext uri="{FF2B5EF4-FFF2-40B4-BE49-F238E27FC236}">
-                <a16:creationId xmlns:a16="http://schemas.microsoft.com/office/drawing/2014/main" id="{C6DE3F08-4488-69FB-5C30-2894E68A014B}"/>
+                <a16:creationId xmlns:a16="http://schemas.microsoft.com/office/drawing/2014/main" id="{A3C9D616-B2E7-BBD7-72D9-0D035C926CEB}"/>
               </a:ext>
             </a:extLst>
           </p:cNvPr>
@@ -6146,7 +6146,7 @@
                     <p:ext uri="{3AFAAA56-56D3-431D-BCD4-E75A35582382}">
                       <p173:tracksInfo xmlns:p173="http://schemas.microsoft.com/office/powerpoint/2017/3/main" displayLoc="slide">
                         <p173:trackLst>
-                          <p173:track id="{20F21B87-ABF6-4A5D-A9F0-3B48E3A3F76C}" label="English (captions)" lang="en-US" r:embed="rId7"/>
+                          <p173:track id="{2E815599-4356-4C2D-8376-AE8F2F33B4B1}" label="English (captions)" lang="en-US" r:embed="rId7"/>
                         </p173:trackLst>
                       </p173:tracksInfo>
                     </p:ext>
@@ -6991,7 +6991,7 @@
             <a:hlinkClick r:id="" action="ppaction://media"/>
             <a:extLst>
               <a:ext uri="{FF2B5EF4-FFF2-40B4-BE49-F238E27FC236}">
-                <a16:creationId xmlns:a16="http://schemas.microsoft.com/office/drawing/2014/main" id="{557E0A58-5A2B-061C-CC6A-A71874A30BE7}"/>
+                <a16:creationId xmlns:a16="http://schemas.microsoft.com/office/drawing/2014/main" id="{5CE6AAA0-A213-7372-4C6E-6EA998EECD81}"/>
               </a:ext>
             </a:extLst>
           </p:cNvPr>
@@ -7007,7 +7007,7 @@
                     <p:ext uri="{3AFAAA56-56D3-431D-BCD4-E75A35582382}">
                       <p173:tracksInfo xmlns:p173="http://schemas.microsoft.com/office/powerpoint/2017/3/main" displayLoc="slide">
                         <p173:trackLst>
-                          <p173:track id="{8EC31F32-ACD8-4460-A22E-A7F469297FAC}" label="English (captions)" lang="en-US" r:embed="rId7"/>
+                          <p173:track id="{9018C531-BCBF-4A44-ABC1-69EA2058A526}" label="English (captions)" lang="en-US" r:embed="rId7"/>
                         </p173:trackLst>
                       </p173:tracksInfo>
                     </p:ext>
@@ -7526,7 +7526,7 @@
             <a:hlinkClick r:id="" action="ppaction://media"/>
             <a:extLst>
               <a:ext uri="{FF2B5EF4-FFF2-40B4-BE49-F238E27FC236}">
-                <a16:creationId xmlns:a16="http://schemas.microsoft.com/office/drawing/2014/main" id="{D6ED34D4-AACE-81DC-2853-58A34E58CCB0}"/>
+                <a16:creationId xmlns:a16="http://schemas.microsoft.com/office/drawing/2014/main" id="{6E40B4A1-EB29-3D49-AB8B-E6E55C5706F1}"/>
               </a:ext>
             </a:extLst>
           </p:cNvPr>
@@ -7542,7 +7542,7 @@
                     <p:ext uri="{3AFAAA56-56D3-431D-BCD4-E75A35582382}">
                       <p173:tracksInfo xmlns:p173="http://schemas.microsoft.com/office/powerpoint/2017/3/main" displayLoc="slide">
                         <p173:trackLst>
-                          <p173:track id="{11CCD6A5-2D6E-4A84-9B66-2BF7195BB71B}" label="English (captions)" lang="en-US" r:embed="rId7"/>
+                          <p173:track id="{7634769D-1130-4C2D-8119-2CAB1860B5BD}" label="English (captions)" lang="en-US" r:embed="rId7"/>
                         </p173:trackLst>
                       </p173:tracksInfo>
                     </p:ext>
@@ -7783,13 +7783,7 @@
       </p:sp>
       <p:pic>
         <p:nvPicPr>
-          <p:cNvPr id="5" name="Image 0">
-            <a:extLst>
-              <a:ext uri="{C183D7F6-B498-43B3-948B-1728B52AA6E4}">
-                <adec:decorative xmlns:adec="http://schemas.microsoft.com/office/drawing/2017/decorative" val="1"/>
-              </a:ext>
-            </a:extLst>
-          </p:cNvPr>
+          <p:cNvPr id="5" name="Image 0" descr="The Federal HR 2.0 window from Book 03: December 10, 2025, the OMB/OPM memo, one Core HCM platform and agencies pause their own; June 10, 2026, the Core HCM award to Oracle Fusion Cloud HCM; onboarding months 1 to 5, the window in which data standards, cleanup, interconnection design and the identity feed are decided; interconnection go-live, where the window closes; FY 2028, one system."/>
           <p:cNvPicPr>
             <a:picLocks noChangeAspect="1"/>
           </p:cNvPicPr>
@@ -8067,7 +8061,7 @@
             <a:hlinkClick r:id="" action="ppaction://media"/>
             <a:extLst>
               <a:ext uri="{FF2B5EF4-FFF2-40B4-BE49-F238E27FC236}">
-                <a16:creationId xmlns:a16="http://schemas.microsoft.com/office/drawing/2014/main" id="{EFDBC75F-423E-7F04-25D5-718B621C1AA0}"/>
+                <a16:creationId xmlns:a16="http://schemas.microsoft.com/office/drawing/2014/main" id="{1961B508-F8ED-DEF4-4F42-07B5889C0A9F}"/>
               </a:ext>
             </a:extLst>
           </p:cNvPr>
@@ -8083,7 +8077,7 @@
                     <p:ext uri="{3AFAAA56-56D3-431D-BCD4-E75A35582382}">
                       <p173:tracksInfo xmlns:p173="http://schemas.microsoft.com/office/powerpoint/2017/3/main" displayLoc="slide">
                         <p173:trackLst>
-                          <p173:track id="{F996864D-6C0E-460C-B14D-3F77A212DB0A}" label="English (captions)" lang="en-US" r:embed="rId7"/>
+                          <p173:track id="{8AEA01E1-AF97-42D6-A3A9-94FE36990F41}" label="English (captions)" lang="en-US" r:embed="rId7"/>
                         </p173:trackLst>
                       </p173:tracksInfo>
                     </p:ext>
@@ -8910,7 +8904,7 @@
             <a:hlinkClick r:id="" action="ppaction://media"/>
             <a:extLst>
               <a:ext uri="{FF2B5EF4-FFF2-40B4-BE49-F238E27FC236}">
-                <a16:creationId xmlns:a16="http://schemas.microsoft.com/office/drawing/2014/main" id="{34355B33-C8E8-709E-5DB5-C8088A306E24}"/>
+                <a16:creationId xmlns:a16="http://schemas.microsoft.com/office/drawing/2014/main" id="{4E3E7D01-4E2E-B564-6A79-9A4F0B1E095E}"/>
               </a:ext>
             </a:extLst>
           </p:cNvPr>
@@ -8926,7 +8920,7 @@
                     <p:ext uri="{3AFAAA56-56D3-431D-BCD4-E75A35582382}">
                       <p173:tracksInfo xmlns:p173="http://schemas.microsoft.com/office/powerpoint/2017/3/main" displayLoc="slide">
                         <p173:trackLst>
-                          <p173:track id="{72E3F08E-77D9-4DA5-BDFC-5DEC6C60F822}" label="English (captions)" lang="en-US" r:embed="rId7"/>
+                          <p173:track id="{2D9C97EE-5EDE-4CF3-A88B-344826D6FA98}" label="English (captions)" lang="en-US" r:embed="rId7"/>
                         </p173:trackLst>
                       </p173:tracksInfo>
                     </p:ext>
@@ -9795,7 +9789,7 @@
             <a:hlinkClick r:id="" action="ppaction://media"/>
             <a:extLst>
               <a:ext uri="{FF2B5EF4-FFF2-40B4-BE49-F238E27FC236}">
-                <a16:creationId xmlns:a16="http://schemas.microsoft.com/office/drawing/2014/main" id="{B89760D2-83D9-C103-5F45-C7CCEE08947C}"/>
+                <a16:creationId xmlns:a16="http://schemas.microsoft.com/office/drawing/2014/main" id="{CB0F349A-2251-EC1A-ABE5-48507840B459}"/>
               </a:ext>
             </a:extLst>
           </p:cNvPr>
@@ -9811,7 +9805,7 @@
                     <p:ext uri="{3AFAAA56-56D3-431D-BCD4-E75A35582382}">
                       <p173:tracksInfo xmlns:p173="http://schemas.microsoft.com/office/powerpoint/2017/3/main" displayLoc="slide">
                         <p173:trackLst>
-                          <p173:track id="{D9D43A21-AD09-4ECA-9715-E7B11BBB468E}" label="English (captions)" lang="en-US" r:embed="rId6"/>
+                          <p173:track id="{F29EA923-3BC5-418B-9B95-04C0FDC80F67}" label="English (captions)" lang="en-US" r:embed="rId6"/>
                         </p173:trackLst>
                       </p173:tracksInfo>
                     </p:ext>
@@ -11808,7 +11802,7 @@
             <a:hlinkClick r:id="" action="ppaction://media"/>
             <a:extLst>
               <a:ext uri="{FF2B5EF4-FFF2-40B4-BE49-F238E27FC236}">
-                <a16:creationId xmlns:a16="http://schemas.microsoft.com/office/drawing/2014/main" id="{3CE73D9B-AED8-5B8E-2108-091095DA43CF}"/>
+                <a16:creationId xmlns:a16="http://schemas.microsoft.com/office/drawing/2014/main" id="{9F89CD3E-F618-9D1A-149C-A53F6C061B5A}"/>
               </a:ext>
             </a:extLst>
           </p:cNvPr>
@@ -11824,7 +11818,7 @@
                     <p:ext uri="{3AFAAA56-56D3-431D-BCD4-E75A35582382}">
                       <p173:tracksInfo xmlns:p173="http://schemas.microsoft.com/office/powerpoint/2017/3/main" displayLoc="slide">
                         <p173:trackLst>
-                          <p173:track id="{FB27FBF5-E806-4129-9E74-C5B400073514}" label="English (captions)" lang="en-US" r:embed="rId7"/>
+                          <p173:track id="{15DC7129-B1E5-43B5-B8F2-364ECC12445C}" label="English (captions)" lang="en-US" r:embed="rId7"/>
                         </p173:trackLst>
                       </p173:tracksInfo>
                     </p:ext>

--- a/presentations/start-04-making-the-case/Start_04_Making_the_Case_Narrated.pptx
+++ b/presentations/start-04-making-the-case/Start_04_Making_the_Case_Narrated.pptx
@@ -167,7 +167,7 @@
     </p:spTree>
     <p:extLst>
       <p:ext uri="{BB962C8B-B14F-4D97-AF65-F5344CB8AC3E}">
-        <p14:creationId xmlns:p14="http://schemas.microsoft.com/office/powerpoint/2010/main" val="1923115967"/>
+        <p14:creationId xmlns:p14="http://schemas.microsoft.com/office/powerpoint/2010/main" val="207405236"/>
       </p:ext>
     </p:extLst>
   </p:cSld>
@@ -2099,7 +2099,7 @@
             <a:hlinkClick r:id="" action="ppaction://media"/>
             <a:extLst>
               <a:ext uri="{FF2B5EF4-FFF2-40B4-BE49-F238E27FC236}">
-                <a16:creationId xmlns:a16="http://schemas.microsoft.com/office/drawing/2014/main" id="{255EEC5C-2B6B-BB84-F753-79611AA011CE}"/>
+                <a16:creationId xmlns:a16="http://schemas.microsoft.com/office/drawing/2014/main" id="{77E452AB-C051-C41F-1D29-4436F91B3C10}"/>
               </a:ext>
             </a:extLst>
           </p:cNvPr>
@@ -2115,7 +2115,7 @@
                     <p:ext uri="{3AFAAA56-56D3-431D-BCD4-E75A35582382}">
                       <p173:tracksInfo xmlns:p173="http://schemas.microsoft.com/office/powerpoint/2017/3/main" displayLoc="slide">
                         <p173:trackLst>
-                          <p173:track id="{831CC697-057B-4E74-9614-48C2952A5882}" label="English (captions)" lang="en-US" r:embed="rId6"/>
+                          <p173:track id="{6A5C9693-66A0-4A99-BE19-CD1FBD054594}" label="English (captions)" lang="en-US" r:embed="rId6"/>
                         </p173:trackLst>
                       </p173:tracksInfo>
                     </p:ext>
@@ -2133,7 +2133,7 @@
         </p:blipFill>
         <p:spPr>
           <a:xfrm>
-            <a:off x="127000" y="6350000"/>
+            <a:off x="12446000" y="127000"/>
             <a:ext cx="304800" cy="304800"/>
           </a:xfrm>
           <a:prstGeom prst="rect">
@@ -3548,7 +3548,7 @@
             <a:hlinkClick r:id="" action="ppaction://media"/>
             <a:extLst>
               <a:ext uri="{FF2B5EF4-FFF2-40B4-BE49-F238E27FC236}">
-                <a16:creationId xmlns:a16="http://schemas.microsoft.com/office/drawing/2014/main" id="{66153FE0-C614-F6BF-EC2A-B9E5BB1296C1}"/>
+                <a16:creationId xmlns:a16="http://schemas.microsoft.com/office/drawing/2014/main" id="{5F81AEFD-E590-ECC5-8D73-36A43AEDAA7B}"/>
               </a:ext>
             </a:extLst>
           </p:cNvPr>
@@ -3564,7 +3564,7 @@
                     <p:ext uri="{3AFAAA56-56D3-431D-BCD4-E75A35582382}">
                       <p173:tracksInfo xmlns:p173="http://schemas.microsoft.com/office/powerpoint/2017/3/main" displayLoc="slide">
                         <p173:trackLst>
-                          <p173:track id="{F262DCDB-770F-4434-B260-A95A560A2BFF}" label="English (captions)" lang="en-US" r:embed="rId7"/>
+                          <p173:track id="{617C1029-D4CB-4F03-974A-B7D1AB83892B}" label="English (captions)" lang="en-US" r:embed="rId7"/>
                         </p173:trackLst>
                       </p173:tracksInfo>
                     </p:ext>
@@ -3582,7 +3582,7 @@
         </p:blipFill>
         <p:spPr>
           <a:xfrm>
-            <a:off x="127000" y="6350000"/>
+            <a:off x="12446000" y="127000"/>
             <a:ext cx="304800" cy="304800"/>
           </a:xfrm>
           <a:prstGeom prst="rect">
@@ -4539,7 +4539,7 @@
             <a:hlinkClick r:id="" action="ppaction://media"/>
             <a:extLst>
               <a:ext uri="{FF2B5EF4-FFF2-40B4-BE49-F238E27FC236}">
-                <a16:creationId xmlns:a16="http://schemas.microsoft.com/office/drawing/2014/main" id="{AE3BD132-86AB-C7C2-09CD-89A4138348DD}"/>
+                <a16:creationId xmlns:a16="http://schemas.microsoft.com/office/drawing/2014/main" id="{8994FCB9-B38A-E3C0-DE25-491A7C5C45C8}"/>
               </a:ext>
             </a:extLst>
           </p:cNvPr>
@@ -4555,7 +4555,7 @@
                     <p:ext uri="{3AFAAA56-56D3-431D-BCD4-E75A35582382}">
                       <p173:tracksInfo xmlns:p173="http://schemas.microsoft.com/office/powerpoint/2017/3/main" displayLoc="slide">
                         <p173:trackLst>
-                          <p173:track id="{4A24E7BF-BC99-43DB-BC3E-A0ACF2C9A525}" label="English (captions)" lang="en-US" r:embed="rId8"/>
+                          <p173:track id="{A4C5C127-A03D-4B37-8383-C2AEE57C398F}" label="English (captions)" lang="en-US" r:embed="rId8"/>
                         </p173:trackLst>
                       </p173:tracksInfo>
                     </p:ext>
@@ -4573,7 +4573,7 @@
         </p:blipFill>
         <p:spPr>
           <a:xfrm>
-            <a:off x="127000" y="6350000"/>
+            <a:off x="12446000" y="127000"/>
             <a:ext cx="304800" cy="304800"/>
           </a:xfrm>
           <a:prstGeom prst="rect">
@@ -6130,7 +6130,7 @@
             <a:hlinkClick r:id="" action="ppaction://media"/>
             <a:extLst>
               <a:ext uri="{FF2B5EF4-FFF2-40B4-BE49-F238E27FC236}">
-                <a16:creationId xmlns:a16="http://schemas.microsoft.com/office/drawing/2014/main" id="{A3C9D616-B2E7-BBD7-72D9-0D035C926CEB}"/>
+                <a16:creationId xmlns:a16="http://schemas.microsoft.com/office/drawing/2014/main" id="{B9E47BAB-92D0-E6E0-E373-DF47B2E53FDD}"/>
               </a:ext>
             </a:extLst>
           </p:cNvPr>
@@ -6146,7 +6146,7 @@
                     <p:ext uri="{3AFAAA56-56D3-431D-BCD4-E75A35582382}">
                       <p173:tracksInfo xmlns:p173="http://schemas.microsoft.com/office/powerpoint/2017/3/main" displayLoc="slide">
                         <p173:trackLst>
-                          <p173:track id="{2E815599-4356-4C2D-8376-AE8F2F33B4B1}" label="English (captions)" lang="en-US" r:embed="rId7"/>
+                          <p173:track id="{CC777B30-5C9D-441C-8FD4-C8EEF81F94EB}" label="English (captions)" lang="en-US" r:embed="rId7"/>
                         </p173:trackLst>
                       </p173:tracksInfo>
                     </p:ext>
@@ -6164,7 +6164,7 @@
         </p:blipFill>
         <p:spPr>
           <a:xfrm>
-            <a:off x="127000" y="6350000"/>
+            <a:off x="12446000" y="127000"/>
             <a:ext cx="304800" cy="304800"/>
           </a:xfrm>
           <a:prstGeom prst="rect">
@@ -6991,7 +6991,7 @@
             <a:hlinkClick r:id="" action="ppaction://media"/>
             <a:extLst>
               <a:ext uri="{FF2B5EF4-FFF2-40B4-BE49-F238E27FC236}">
-                <a16:creationId xmlns:a16="http://schemas.microsoft.com/office/drawing/2014/main" id="{5CE6AAA0-A213-7372-4C6E-6EA998EECD81}"/>
+                <a16:creationId xmlns:a16="http://schemas.microsoft.com/office/drawing/2014/main" id="{AD944B14-9623-4575-E942-7E62E26A911D}"/>
               </a:ext>
             </a:extLst>
           </p:cNvPr>
@@ -7007,7 +7007,7 @@
                     <p:ext uri="{3AFAAA56-56D3-431D-BCD4-E75A35582382}">
                       <p173:tracksInfo xmlns:p173="http://schemas.microsoft.com/office/powerpoint/2017/3/main" displayLoc="slide">
                         <p173:trackLst>
-                          <p173:track id="{9018C531-BCBF-4A44-ABC1-69EA2058A526}" label="English (captions)" lang="en-US" r:embed="rId7"/>
+                          <p173:track id="{D1F2FD7C-8EAA-4D8F-86D0-3B53757D6711}" label="English (captions)" lang="en-US" r:embed="rId7"/>
                         </p173:trackLst>
                       </p173:tracksInfo>
                     </p:ext>
@@ -7025,7 +7025,7 @@
         </p:blipFill>
         <p:spPr>
           <a:xfrm>
-            <a:off x="127000" y="6350000"/>
+            <a:off x="12446000" y="127000"/>
             <a:ext cx="304800" cy="304800"/>
           </a:xfrm>
           <a:prstGeom prst="rect">
@@ -7526,7 +7526,7 @@
             <a:hlinkClick r:id="" action="ppaction://media"/>
             <a:extLst>
               <a:ext uri="{FF2B5EF4-FFF2-40B4-BE49-F238E27FC236}">
-                <a16:creationId xmlns:a16="http://schemas.microsoft.com/office/drawing/2014/main" id="{6E40B4A1-EB29-3D49-AB8B-E6E55C5706F1}"/>
+                <a16:creationId xmlns:a16="http://schemas.microsoft.com/office/drawing/2014/main" id="{65070EA6-F0D1-DACB-3CD4-9C355875D15C}"/>
               </a:ext>
             </a:extLst>
           </p:cNvPr>
@@ -7542,7 +7542,7 @@
                     <p:ext uri="{3AFAAA56-56D3-431D-BCD4-E75A35582382}">
                       <p173:tracksInfo xmlns:p173="http://schemas.microsoft.com/office/powerpoint/2017/3/main" displayLoc="slide">
                         <p173:trackLst>
-                          <p173:track id="{7634769D-1130-4C2D-8119-2CAB1860B5BD}" label="English (captions)" lang="en-US" r:embed="rId7"/>
+                          <p173:track id="{A250ED3C-6EA6-4BA9-AD73-F7AF3917811E}" label="English (captions)" lang="en-US" r:embed="rId7"/>
                         </p173:trackLst>
                       </p173:tracksInfo>
                     </p:ext>
@@ -7560,7 +7560,7 @@
         </p:blipFill>
         <p:spPr>
           <a:xfrm>
-            <a:off x="127000" y="6350000"/>
+            <a:off x="12446000" y="127000"/>
             <a:ext cx="304800" cy="304800"/>
           </a:xfrm>
           <a:prstGeom prst="rect">
@@ -8061,7 +8061,7 @@
             <a:hlinkClick r:id="" action="ppaction://media"/>
             <a:extLst>
               <a:ext uri="{FF2B5EF4-FFF2-40B4-BE49-F238E27FC236}">
-                <a16:creationId xmlns:a16="http://schemas.microsoft.com/office/drawing/2014/main" id="{1961B508-F8ED-DEF4-4F42-07B5889C0A9F}"/>
+                <a16:creationId xmlns:a16="http://schemas.microsoft.com/office/drawing/2014/main" id="{7127A32A-D4CA-8B80-04EA-81B08B4477CD}"/>
               </a:ext>
             </a:extLst>
           </p:cNvPr>
@@ -8077,7 +8077,7 @@
                     <p:ext uri="{3AFAAA56-56D3-431D-BCD4-E75A35582382}">
                       <p173:tracksInfo xmlns:p173="http://schemas.microsoft.com/office/powerpoint/2017/3/main" displayLoc="slide">
                         <p173:trackLst>
-                          <p173:track id="{8AEA01E1-AF97-42D6-A3A9-94FE36990F41}" label="English (captions)" lang="en-US" r:embed="rId7"/>
+                          <p173:track id="{B9440A3D-E3C7-4649-A8A3-9B10FB59DDE9}" label="English (captions)" lang="en-US" r:embed="rId7"/>
                         </p173:trackLst>
                       </p173:tracksInfo>
                     </p:ext>
@@ -8095,7 +8095,7 @@
         </p:blipFill>
         <p:spPr>
           <a:xfrm>
-            <a:off x="127000" y="6350000"/>
+            <a:off x="12446000" y="127000"/>
             <a:ext cx="304800" cy="304800"/>
           </a:xfrm>
           <a:prstGeom prst="rect">
@@ -8904,7 +8904,7 @@
             <a:hlinkClick r:id="" action="ppaction://media"/>
             <a:extLst>
               <a:ext uri="{FF2B5EF4-FFF2-40B4-BE49-F238E27FC236}">
-                <a16:creationId xmlns:a16="http://schemas.microsoft.com/office/drawing/2014/main" id="{4E3E7D01-4E2E-B564-6A79-9A4F0B1E095E}"/>
+                <a16:creationId xmlns:a16="http://schemas.microsoft.com/office/drawing/2014/main" id="{5DE7BC57-2BD7-A01A-38B2-14FA39FCF801}"/>
               </a:ext>
             </a:extLst>
           </p:cNvPr>
@@ -8920,7 +8920,7 @@
                     <p:ext uri="{3AFAAA56-56D3-431D-BCD4-E75A35582382}">
                       <p173:tracksInfo xmlns:p173="http://schemas.microsoft.com/office/powerpoint/2017/3/main" displayLoc="slide">
                         <p173:trackLst>
-                          <p173:track id="{2D9C97EE-5EDE-4CF3-A88B-344826D6FA98}" label="English (captions)" lang="en-US" r:embed="rId7"/>
+                          <p173:track id="{EF4D1DAD-0784-4192-A248-4AB9FB7D6227}" label="English (captions)" lang="en-US" r:embed="rId7"/>
                         </p173:trackLst>
                       </p173:tracksInfo>
                     </p:ext>
@@ -8938,7 +8938,7 @@
         </p:blipFill>
         <p:spPr>
           <a:xfrm>
-            <a:off x="127000" y="6350000"/>
+            <a:off x="12446000" y="127000"/>
             <a:ext cx="304800" cy="304800"/>
           </a:xfrm>
           <a:prstGeom prst="rect">
@@ -9789,7 +9789,7 @@
             <a:hlinkClick r:id="" action="ppaction://media"/>
             <a:extLst>
               <a:ext uri="{FF2B5EF4-FFF2-40B4-BE49-F238E27FC236}">
-                <a16:creationId xmlns:a16="http://schemas.microsoft.com/office/drawing/2014/main" id="{CB0F349A-2251-EC1A-ABE5-48507840B459}"/>
+                <a16:creationId xmlns:a16="http://schemas.microsoft.com/office/drawing/2014/main" id="{5AAB3239-66BE-FDB8-C247-25A96C605023}"/>
               </a:ext>
             </a:extLst>
           </p:cNvPr>
@@ -9805,7 +9805,7 @@
                     <p:ext uri="{3AFAAA56-56D3-431D-BCD4-E75A35582382}">
                       <p173:tracksInfo xmlns:p173="http://schemas.microsoft.com/office/powerpoint/2017/3/main" displayLoc="slide">
                         <p173:trackLst>
-                          <p173:track id="{F29EA923-3BC5-418B-9B95-04C0FDC80F67}" label="English (captions)" lang="en-US" r:embed="rId6"/>
+                          <p173:track id="{A9FD2A2B-107C-4E98-9C7C-83445CECB305}" label="English (captions)" lang="en-US" r:embed="rId6"/>
                         </p173:trackLst>
                       </p173:tracksInfo>
                     </p:ext>
@@ -9823,7 +9823,7 @@
         </p:blipFill>
         <p:spPr>
           <a:xfrm>
-            <a:off x="127000" y="6350000"/>
+            <a:off x="12446000" y="127000"/>
             <a:ext cx="304800" cy="304800"/>
           </a:xfrm>
           <a:prstGeom prst="rect">
@@ -11802,7 +11802,7 @@
             <a:hlinkClick r:id="" action="ppaction://media"/>
             <a:extLst>
               <a:ext uri="{FF2B5EF4-FFF2-40B4-BE49-F238E27FC236}">
-                <a16:creationId xmlns:a16="http://schemas.microsoft.com/office/drawing/2014/main" id="{9F89CD3E-F618-9D1A-149C-A53F6C061B5A}"/>
+                <a16:creationId xmlns:a16="http://schemas.microsoft.com/office/drawing/2014/main" id="{35733D4C-280F-9FE3-D6F8-A319E3903EAC}"/>
               </a:ext>
             </a:extLst>
           </p:cNvPr>
@@ -11818,7 +11818,7 @@
                     <p:ext uri="{3AFAAA56-56D3-431D-BCD4-E75A35582382}">
                       <p173:tracksInfo xmlns:p173="http://schemas.microsoft.com/office/powerpoint/2017/3/main" displayLoc="slide">
                         <p173:trackLst>
-                          <p173:track id="{15DC7129-B1E5-43B5-B8F2-364ECC12445C}" label="English (captions)" lang="en-US" r:embed="rId7"/>
+                          <p173:track id="{CC1F1F6C-B333-4AD4-B9DC-EA6F496D7189}" label="English (captions)" lang="en-US" r:embed="rId7"/>
                         </p173:trackLst>
                       </p173:tracksInfo>
                     </p:ext>
@@ -11836,7 +11836,7 @@
         </p:blipFill>
         <p:spPr>
           <a:xfrm>
-            <a:off x="127000" y="6350000"/>
+            <a:off x="12446000" y="127000"/>
             <a:ext cx="304800" cy="304800"/>
           </a:xfrm>
           <a:prstGeom prst="rect">
